--- a/report/IoT_IDS_CNN_LSTM_slides.pptx
+++ b/report/IoT_IDS_CNN_LSTM_slides.pptx
@@ -2866,6 +2866,88 @@
           </a:p>
         </p:txBody>
       </p:sp>
+      <p:sp>
+        <p:nvSpPr>
+          <p:cNvPr id="6" name="Text 4"/>
+          <p:cNvSpPr txBox="1"/>
+          <p:nvPr/>
+        </p:nvSpPr>
+        <p:spPr>
+          <a:xfrm>
+            <a:off x="5303520" y="3246120"/>
+            <a:ext cx="3291840" cy="1005840"/>
+          </a:xfrm>
+          <a:prstGeom prst="rect">
+            <a:avLst/>
+          </a:prstGeom>
+          <a:noFill/>
+          <a:ln/>
+        </p:spPr>
+        <p:txBody>
+          <a:bodyPr wrap="square" lIns="0" tIns="0" rIns="0" bIns="0" rtlCol="0" anchor="ctr"/>
+          <a:lstStyle/>
+          <a:p>
+            <a:pPr algn="r" indent="0" marL="0">
+              <a:spcAft>
+                <a:spcPts val="400"/>
+              </a:spcAft>
+              <a:buNone/>
+            </a:pPr>
+            <a:r>
+              <a:rPr lang="en-US" sz="1300" dirty="0">
+                <a:solidFill>
+                  <a:srgbClr val="C9D3DD"/>
+                </a:solidFill>
+                <a:latin typeface="Calibri" pitchFamily="34" charset="0"/>
+                <a:ea typeface="Calibri" pitchFamily="34" charset="-122"/>
+                <a:cs typeface="Calibri" pitchFamily="34" charset="-120"/>
+              </a:rPr>
+              <a:t>Internet of Things</a:t>
+            </a:r>
+            <a:endParaRPr lang="en-US" sz="1300" dirty="0"/>
+          </a:p>
+          <a:p>
+            <a:pPr algn="r" indent="0" marL="0">
+              <a:spcAft>
+                <a:spcPts val="400"/>
+              </a:spcAft>
+              <a:buNone/>
+            </a:pPr>
+            <a:r>
+              <a:rPr lang="en-US" sz="1300" dirty="0">
+                <a:solidFill>
+                  <a:srgbClr val="C9D3DD"/>
+                </a:solidFill>
+                <a:latin typeface="Calibri" pitchFamily="34" charset="0"/>
+                <a:ea typeface="Calibri" pitchFamily="34" charset="-122"/>
+                <a:cs typeface="Calibri" pitchFamily="34" charset="-120"/>
+              </a:rPr>
+              <a:t>Instructor: Mr. Sridhar Sanshi</a:t>
+            </a:r>
+            <a:endParaRPr lang="en-US" sz="1300" dirty="0"/>
+          </a:p>
+          <a:p>
+            <a:pPr algn="r" indent="0" marL="0">
+              <a:spcAft>
+                <a:spcPts val="400"/>
+              </a:spcAft>
+              <a:buNone/>
+            </a:pPr>
+            <a:r>
+              <a:rPr lang="en-US" sz="1300" dirty="0">
+                <a:solidFill>
+                  <a:srgbClr val="C9D3DD"/>
+                </a:solidFill>
+                <a:latin typeface="Calibri" pitchFamily="34" charset="0"/>
+                <a:ea typeface="Calibri" pitchFamily="34" charset="-122"/>
+                <a:cs typeface="Calibri" pitchFamily="34" charset="-120"/>
+              </a:rPr>
+              <a:t>28 September 2026</a:t>
+            </a:r>
+            <a:endParaRPr lang="en-US" sz="1300" dirty="0"/>
+          </a:p>
+        </p:txBody>
+      </p:sp>
     </p:spTree>
   </p:cSld>
   <p:clrMapOvr>
